--- a/docs/presentation.pptx
+++ b/docs/presentation.pptx
@@ -3615,7 +3615,7 @@
               </a:defRPr>
             </a:pPr>
             <a:r>
-              <a:t>30 из 31,9</a:t>
+              <a:t>29–30 из 31,9</a:t>
             </a:r>
           </a:p>
         </p:txBody>
@@ -3891,7 +3891,7 @@
               </a:defRPr>
             </a:pPr>
             <a:r>
-              <a:t>загрузка вагона в части межпиковых слотов по модели. Норма 120 человек на вагон</a:t>
+              <a:t>загрузка вагона в части слотов днём и вечером по модели. Норма 120 человек на вагон</a:t>
             </a:r>
           </a:p>
         </p:txBody>
@@ -4262,7 +4262,7 @@
               </a:defRPr>
             </a:pPr>
             <a:r>
-              <a:t>Демо: утренний пик, нужен ещё состав</a:t>
+              <a:t>Демо: утренний пик, подготовить резерв</a:t>
             </a:r>
           </a:p>
           <a:p>
@@ -4274,7 +4274,7 @@
               </a:defRPr>
             </a:pPr>
             <a:r>
-              <a:t>03.02.2026, 07:30. Система предлагает решение за 30 минут до слота</a:t>
+              <a:t>15.09.2026, 07:15. Система предлагает решение за 30 минут до слота</a:t>
             </a:r>
           </a:p>
         </p:txBody>
@@ -4402,7 +4402,7 @@
               </a:defRPr>
             </a:pPr>
             <a:r>
-              <a:t>Демо: аномальный день, но график справляется</a:t>
+              <a:t>Демо: аномальный час, но график справляется</a:t>
             </a:r>
           </a:p>
           <a:p>
@@ -4414,7 +4414,7 @@
               </a:defRPr>
             </a:pPr>
             <a:r>
-              <a:t>08.05.2026, пятница перед праздниками, поток +38% к норме дня</a:t>
+              <a:t>08.05.2026, пятница перед праздниками: после обеда поток на треть выше нормы</a:t>
             </a:r>
           </a:p>
         </p:txBody>
@@ -4554,7 +4554,7 @@
               </a:defRPr>
             </a:pPr>
             <a:r>
-              <a:t>03.02.2026, 12:00. Загрузка после снятия остаётся в пределах нормы</a:t>
+              <a:t>03.02.2026, 10:45. Загрузка после снятия остаётся в пределах нормы</a:t>
             </a:r>
           </a:p>
         </p:txBody>
@@ -4775,7 +4775,7 @@
               </a:defRPr>
             </a:pPr>
             <a:r>
-              <a:t>13 из 14</a:t>
+              <a:t>11 из 11</a:t>
             </a:r>
           </a:p>
         </p:txBody>
@@ -4813,7 +4813,7 @@
               </a:defRPr>
             </a:pPr>
             <a:r>
-              <a:t>перегрузов предсказано за 30 минут. Реактивный порог без прогноза: 0 из 14</a:t>
+              <a:t>перегрузов замечено за 30 минут при 164 сигналах. Норма дня без ML: 11 из 11 при 232, последний слот: 0 из 11</a:t>
             </a:r>
           </a:p>
         </p:txBody>
@@ -4894,7 +4894,7 @@
               </a:defRPr>
             </a:pPr>
             <a:r>
-              <a:t>14 → 9</a:t>
+              <a:t>11 → 7</a:t>
             </a:r>
           </a:p>
         </p:txBody>
@@ -4932,7 +4932,7 @@
               </a:defRPr>
             </a:pPr>
             <a:r>
-              <a:t>интервалов выше нормы, −54% пассажиров сверх нормы вагона</a:t>
+              <a:t>интервалов выше нормы, −56% пассажиров сверх нормы вагона. Интервал 1:53 и резерв не дают снять всё</a:t>
             </a:r>
           </a:p>
         </p:txBody>
@@ -5013,7 +5013,7 @@
               </a:defRPr>
             </a:pPr>
             <a:r>
-              <a:t>4.0%</a:t>
+              <a:t>4.4%</a:t>
             </a:r>
           </a:p>
         </p:txBody>
@@ -5051,7 +5051,7 @@
               </a:defRPr>
             </a:pPr>
             <a:r>
-              <a:t>ошибка прогноза потока линии на 30 минут, у нормы дня 7.7%</a:t>
+              <a:t>ошибка прогноза потока линии на 30 минут, у нормы дня 7.7%. По станциям 9.6% против 12.5%</a:t>
             </a:r>
           </a:p>
         </p:txBody>
@@ -5089,7 +5089,7 @@
               </a:defRPr>
             </a:pPr>
             <a:r>
-              <a:t>На недогрузе можно не выпускать около 37 поездо-часов в сутки (5.8% плана), ни разу вагон не превысил 95% нормы.</a:t>
+              <a:t>Точность сигналов 7%, около 2 сигнала в день. Порог 85% выбран по таблице на тех же данных. Потенциал снятия составов около 27 поездо-часов в сутки (4.3% плана), вагон после снятия не выше 95% нормы.</a:t>
             </a:r>
           </a:p>
           <a:p>
@@ -5104,7 +5104,7 @@
               </a:defRPr>
             </a:pPr>
             <a:r>
-              <a:t>Загрузка вагона оценена моделью. При другой калибровке число перегрузов от 0 до 139, но прогноз ловит 93–99% из них, реактивный порог не больше 15%.</a:t>
+              <a:t>Загрузка вагона оценена моделью. При другой калибровке число перегрузов от 0 до 132, но где они есть, прогноз замечает 95–100% из них, последний слот не больше 17%.</a:t>
             </a:r>
           </a:p>
         </p:txBody>
@@ -5246,7 +5246,7 @@
               </a:defRPr>
             </a:pPr>
             <a:r>
-              <a:t>Экономия = 37 поездо-ч в сутки × 250 рабочих дней × стоимость поездо-часа. Каждые 1000 ₽ за поездо-час дают около 9,4 млн ₽ в год на одной линии. Стоимость поездо-часа подставит метрополитен.</a:t>
+              <a:t>Потенциал на недогрузе: 27 поездо-ч в сутки × 250 рабочих дней × стоимость поездо-часа. Каждые 1000 ₽ за поездо-час дают около 6,8 млн ₽ в год на одной линии. Стоимость поездо-часа подставит метрополитен, срок снятия составов нужно пересчитать по графику оборота (99 минут).</a:t>
             </a:r>
           </a:p>
           <a:p>
@@ -5276,7 +5276,7 @@
               </a:defRPr>
             </a:pPr>
             <a:r>
-              <a:t>Цена ложного сигнала «добавить»: около 0,4 поездо-часа в сутки. Решение принимает диспетчер.</a:t>
+              <a:t>Все сигналы «добавить» вместе стоят около 0,7 поездо-часа в сутки. Решение принимает диспетчер.</a:t>
             </a:r>
           </a:p>
           <a:p>
@@ -5546,7 +5546,7 @@
               </a:defRPr>
             </a:pPr>
             <a:r>
-              <a:t>Загрузка вагонов оценочная: калибровка по датчикам РПДП, до неё сигнал заранее при 90% нормы.</a:t>
+              <a:t>Загрузка вагонов оценочная: калибровка по датчикам РПДП и по реальным случаям выше нормы, до неё сигнал заранее при 85% нормы.</a:t>
             </a:r>
           </a:p>
           <a:p>
